--- a/public/fun/pack/pptx/news/카드뉴스_13_계절안부_오월숲길.pptx
+++ b/public/fun/pack/pptx/news/카드뉴스_13_계절안부_오월숲길.pptx
@@ -3348,7 +3348,7 @@
             <a:r>
               <a:rPr sz="3000" b="1" i="0">
                 <a:solidFill>
-                  <a:srgbClr val="143D21"/>
+                  <a:srgbClr val="1D7236"/>
                 </a:solidFill>
               </a:rPr>
               <a:t>황사 심한 날 이렇게 지내세요</a:t>
@@ -3386,7 +3386,7 @@
             <a:r>
               <a:rPr sz="1500" b="0" i="1">
                 <a:solidFill>
-                  <a:srgbClr val="143D21"/>
+                  <a:srgbClr val="1D7236"/>
                 </a:solidFill>
               </a:rPr>
               <a:t>옆으로 넘겨 보세요 →</a:t>
@@ -3446,7 +3446,7 @@
     <p:bg>
       <p:bgPr>
         <a:solidFill>
-          <a:srgbClr val="D0F1DA"/>
+          <a:srgbClr val="D4F7DE"/>
         </a:solidFill>
         <a:effectLst/>
       </p:bgPr>
@@ -3477,7 +3477,7 @@
           </a:solidFill>
           <a:ln w="25400">
             <a:solidFill>
-              <a:srgbClr val="2B8245"/>
+              <a:srgbClr val="43D66F"/>
             </a:solidFill>
             <a:prstDash val="dash"/>
           </a:ln>
@@ -3520,7 +3520,7 @@
             <a:r>
               <a:rPr sz="2600" b="1" i="0">
                 <a:solidFill>
-                  <a:srgbClr val="143D21"/>
+                  <a:srgbClr val="1D7236"/>
                 </a:solidFill>
               </a:rPr>
               <a:t>겉옷 한 벌 챙기세요</a:t>
@@ -3558,7 +3558,7 @@
             <a:r>
               <a:rPr sz="6600" b="1" i="0">
                 <a:solidFill>
-                  <a:srgbClr val="2B8245"/>
+                  <a:srgbClr val="43D66F"/>
                 </a:solidFill>
               </a:rPr>
               <a:t>01</a:t>
@@ -3656,7 +3656,7 @@
     <p:bg>
       <p:bgPr>
         <a:solidFill>
-          <a:srgbClr val="D0F1DA"/>
+          <a:srgbClr val="D4F7DE"/>
         </a:solidFill>
         <a:effectLst/>
       </p:bgPr>
@@ -3687,7 +3687,7 @@
           </a:solidFill>
           <a:ln w="25400">
             <a:solidFill>
-              <a:srgbClr val="2B8245"/>
+              <a:srgbClr val="43D66F"/>
             </a:solidFill>
             <a:prstDash val="dash"/>
           </a:ln>
@@ -3730,7 +3730,7 @@
             <a:r>
               <a:rPr sz="2600" b="1" i="0">
                 <a:solidFill>
-                  <a:srgbClr val="143D21"/>
+                  <a:srgbClr val="1D7236"/>
                 </a:solidFill>
               </a:rPr>
               <a:t>계절 인사 한 줄 보내기</a:t>
@@ -3768,7 +3768,7 @@
             <a:r>
               <a:rPr sz="6600" b="1" i="0">
                 <a:solidFill>
-                  <a:srgbClr val="2B8245"/>
+                  <a:srgbClr val="43D66F"/>
                 </a:solidFill>
               </a:rPr>
               <a:t>02</a:t>
@@ -3866,7 +3866,7 @@
     <p:bg>
       <p:bgPr>
         <a:solidFill>
-          <a:srgbClr val="D0F1DA"/>
+          <a:srgbClr val="D4F7DE"/>
         </a:solidFill>
         <a:effectLst/>
       </p:bgPr>
@@ -3897,7 +3897,7 @@
           </a:solidFill>
           <a:ln w="25400">
             <a:solidFill>
-              <a:srgbClr val="2B8245"/>
+              <a:srgbClr val="43D66F"/>
             </a:solidFill>
             <a:prstDash val="dash"/>
           </a:ln>
@@ -3940,7 +3940,7 @@
             <a:r>
               <a:rPr sz="2600" b="1" i="0">
                 <a:solidFill>
-                  <a:srgbClr val="143D21"/>
+                  <a:srgbClr val="1D7236"/>
                 </a:solidFill>
               </a:rPr>
               <a:t>제철 음식으로 기운 채우기</a:t>
@@ -3978,7 +3978,7 @@
             <a:r>
               <a:rPr sz="6600" b="1" i="0">
                 <a:solidFill>
-                  <a:srgbClr val="2B8245"/>
+                  <a:srgbClr val="43D66F"/>
                 </a:solidFill>
               </a:rPr>
               <a:t>03</a:t>
@@ -4076,7 +4076,7 @@
     <p:bg>
       <p:bgPr>
         <a:solidFill>
-          <a:srgbClr val="D0F1DA"/>
+          <a:srgbClr val="D4F7DE"/>
         </a:solidFill>
         <a:effectLst/>
       </p:bgPr>
@@ -4107,7 +4107,7 @@
           </a:solidFill>
           <a:ln w="25400">
             <a:solidFill>
-              <a:srgbClr val="2B8245"/>
+              <a:srgbClr val="43D66F"/>
             </a:solidFill>
             <a:prstDash val="dash"/>
           </a:ln>
@@ -4150,7 +4150,7 @@
             <a:r>
               <a:rPr sz="2600" b="1" i="0">
                 <a:solidFill>
-                  <a:srgbClr val="143D21"/>
+                  <a:srgbClr val="1D7236"/>
                 </a:solidFill>
               </a:rPr>
               <a:t>창문 열고 환기하기</a:t>
@@ -4188,7 +4188,7 @@
             <a:r>
               <a:rPr sz="6600" b="1" i="0">
                 <a:solidFill>
-                  <a:srgbClr val="2B8245"/>
+                  <a:srgbClr val="43D66F"/>
                 </a:solidFill>
               </a:rPr>
               <a:t>04</a:t>
@@ -4286,7 +4286,7 @@
     <p:bg>
       <p:bgPr>
         <a:solidFill>
-          <a:srgbClr val="D0F1DA"/>
+          <a:srgbClr val="D4F7DE"/>
         </a:solidFill>
         <a:effectLst/>
       </p:bgPr>
@@ -4317,7 +4317,7 @@
           </a:solidFill>
           <a:ln w="25400">
             <a:solidFill>
-              <a:srgbClr val="2B8245"/>
+              <a:srgbClr val="43D66F"/>
             </a:solidFill>
             <a:prstDash val="dash"/>
           </a:ln>
@@ -4360,7 +4360,7 @@
             <a:r>
               <a:rPr sz="2600" b="1" i="0">
                 <a:solidFill>
-                  <a:srgbClr val="143D21"/>
+                  <a:srgbClr val="1D7236"/>
                 </a:solidFill>
               </a:rPr>
               <a:t>계절 사진 한 장 남기기</a:t>
@@ -4398,7 +4398,7 @@
             <a:r>
               <a:rPr sz="6600" b="1" i="0">
                 <a:solidFill>
-                  <a:srgbClr val="2B8245"/>
+                  <a:srgbClr val="43D66F"/>
                 </a:solidFill>
               </a:rPr>
               <a:t>05</a:t>
@@ -4554,7 +4554,7 @@
             <a:r>
               <a:rPr sz="2800" b="1" i="0">
                 <a:solidFill>
-                  <a:srgbClr val="143D21"/>
+                  <a:srgbClr val="1D7236"/>
                 </a:solidFill>
               </a:rPr>
               <a:t>저장해 두고 필요할 때 꺼내 보세요</a:t>
@@ -4592,7 +4592,7 @@
             <a:r>
               <a:rPr sz="1500" b="0" i="1">
                 <a:solidFill>
-                  <a:srgbClr val="143D21"/>
+                  <a:srgbClr val="1D7236"/>
                 </a:solidFill>
               </a:rPr>
               <a:t>마음에 들면 공유해 주세요</a:t>
@@ -4657,34 +4657,34 @@
         <a:sysClr val="window" lastClr="FFFFFF"/>
       </a:lt1>
       <a:dk2>
-        <a:srgbClr val="143D21"/>
+        <a:srgbClr val="1D7236"/>
       </a:dk2>
       <a:lt2>
-        <a:srgbClr val="F0FAF3"/>
+        <a:srgbClr val="F3FCF6"/>
       </a:lt2>
       <a:accent1>
-        <a:srgbClr val="2B8245"/>
+        <a:srgbClr val="43D66F"/>
       </a:accent1>
       <a:accent2>
-        <a:srgbClr val="803B91"/>
+        <a:srgbClr val="339941"/>
       </a:accent2>
       <a:accent3>
-        <a:srgbClr val="143D21"/>
+        <a:srgbClr val="1D7236"/>
       </a:accent3>
       <a:accent4>
-        <a:srgbClr val="D0F1DA"/>
+        <a:srgbClr val="D4F7DE"/>
       </a:accent4>
       <a:accent5>
-        <a:srgbClr val="565E6B"/>
+        <a:srgbClr val="3BB858"/>
       </a:accent5>
       <a:accent6>
-        <a:srgbClr val="728B7A"/>
+        <a:srgbClr val="77AA86"/>
       </a:accent6>
       <a:hlink>
-        <a:srgbClr val="2B8245"/>
+        <a:srgbClr val="43D66F"/>
       </a:hlink>
       <a:folHlink>
-        <a:srgbClr val="143D21"/>
+        <a:srgbClr val="1D7236"/>
       </a:folHlink>
     </a:clrScheme>
     <a:fontScheme name="Office">
